--- a/ml-examples/churn_prediction/churn_problem_framing.pptx
+++ b/ml-examples/churn_prediction/churn_problem_framing.pptx
@@ -5684,7 +5684,7 @@
           <a:pPr algn="just"/>
           <a:r>
             <a:rPr lang="en-SG" sz="1600" b="1" dirty="0"/>
-            <a:t>Use Top-K evaluation</a:t>
+            <a:t>Use Top-K% evaluation</a:t>
           </a:r>
         </a:p>
       </dgm:t>
@@ -5858,7 +5858,7 @@
           </a:r>
           <a:r>
             <a:rPr lang="en-SG" sz="1600" b="1" dirty="0"/>
-            <a:t>how many churners are captured within target segments such as the top 10% or 20%.</a:t>
+            <a:t>how many churners are captured within target segments such as the top 10% or 20% of customers.</a:t>
           </a:r>
         </a:p>
       </dgm:t>
@@ -9020,8 +9020,8 @@
       </dsp:nvSpPr>
       <dsp:spPr>
         <a:xfrm>
-          <a:off x="0" y="381508"/>
-          <a:ext cx="11350615" cy="796950"/>
+          <a:off x="0" y="334281"/>
+          <a:ext cx="11350615" cy="777262"/>
         </a:xfrm>
         <a:prstGeom prst="rect">
           <a:avLst/>
@@ -9061,7 +9061,7 @@
         <a:fontRef idx="minor"/>
       </dsp:style>
       <dsp:txBody>
-        <a:bodyPr spcFirstLastPara="0" vert="horz" wrap="square" lIns="880934" tIns="458216" rIns="880934" bIns="113792" numCol="1" spcCol="1270" anchor="t" anchorCtr="0">
+        <a:bodyPr spcFirstLastPara="0" vert="horz" wrap="square" lIns="880934" tIns="437388" rIns="880934" bIns="113792" numCol="1" spcCol="1270" anchor="t" anchorCtr="0">
           <a:noAutofit/>
         </a:bodyPr>
         <a:lstStyle/>
@@ -9089,8 +9089,8 @@
         </a:p>
       </dsp:txBody>
       <dsp:txXfrm>
-        <a:off x="0" y="381508"/>
-        <a:ext cx="11350615" cy="796950"/>
+        <a:off x="0" y="334281"/>
+        <a:ext cx="11350615" cy="777262"/>
       </dsp:txXfrm>
     </dsp:sp>
     <dsp:sp modelId="{098EEF58-BE4A-4205-A3D1-3F9A5D14AD06}">
@@ -9100,8 +9100,8 @@
       </dsp:nvSpPr>
       <dsp:spPr>
         <a:xfrm>
-          <a:off x="567530" y="56788"/>
-          <a:ext cx="7945431" cy="649440"/>
+          <a:off x="567530" y="24321"/>
+          <a:ext cx="7945431" cy="619920"/>
         </a:xfrm>
         <a:prstGeom prst="roundRect">
           <a:avLst/>
@@ -9167,8 +9167,8 @@
         </a:p>
       </dsp:txBody>
       <dsp:txXfrm>
-        <a:off x="599233" y="88491"/>
-        <a:ext cx="7882025" cy="586034"/>
+        <a:off x="597792" y="54583"/>
+        <a:ext cx="7884907" cy="559396"/>
       </dsp:txXfrm>
     </dsp:sp>
     <dsp:sp modelId="{5B0D6773-8027-498F-AC79-813955BC97A3}">
@@ -9178,8 +9178,8 @@
       </dsp:nvSpPr>
       <dsp:spPr>
         <a:xfrm>
-          <a:off x="0" y="1621978"/>
-          <a:ext cx="11350615" cy="796950"/>
+          <a:off x="0" y="1534903"/>
+          <a:ext cx="11350615" cy="777262"/>
         </a:xfrm>
         <a:prstGeom prst="rect">
           <a:avLst/>
@@ -9219,7 +9219,7 @@
         <a:fontRef idx="minor"/>
       </dsp:style>
       <dsp:txBody>
-        <a:bodyPr spcFirstLastPara="0" vert="horz" wrap="square" lIns="880934" tIns="458216" rIns="880934" bIns="113792" numCol="1" spcCol="1270" anchor="t" anchorCtr="0">
+        <a:bodyPr spcFirstLastPara="0" vert="horz" wrap="square" lIns="880934" tIns="437388" rIns="880934" bIns="113792" numCol="1" spcCol="1270" anchor="t" anchorCtr="0">
           <a:noAutofit/>
         </a:bodyPr>
         <a:lstStyle/>
@@ -9247,8 +9247,8 @@
         </a:p>
       </dsp:txBody>
       <dsp:txXfrm>
-        <a:off x="0" y="1621978"/>
-        <a:ext cx="11350615" cy="796950"/>
+        <a:off x="0" y="1534903"/>
+        <a:ext cx="11350615" cy="777262"/>
       </dsp:txXfrm>
     </dsp:sp>
     <dsp:sp modelId="{13FC86DA-7AB3-4125-869D-911F3266DE2F}">
@@ -9258,8 +9258,8 @@
       </dsp:nvSpPr>
       <dsp:spPr>
         <a:xfrm>
-          <a:off x="567530" y="1297258"/>
-          <a:ext cx="7945431" cy="649440"/>
+          <a:off x="567530" y="1224943"/>
+          <a:ext cx="7945431" cy="619920"/>
         </a:xfrm>
         <a:prstGeom prst="roundRect">
           <a:avLst/>
@@ -9324,8 +9324,8 @@
         </a:p>
       </dsp:txBody>
       <dsp:txXfrm>
-        <a:off x="599233" y="1328961"/>
-        <a:ext cx="7882025" cy="586034"/>
+        <a:off x="597792" y="1255205"/>
+        <a:ext cx="7884907" cy="559396"/>
       </dsp:txXfrm>
     </dsp:sp>
     <dsp:sp modelId="{DDB3D809-9B47-49BE-9107-55F458AFA9EC}">
@@ -9335,8 +9335,8 @@
       </dsp:nvSpPr>
       <dsp:spPr>
         <a:xfrm>
-          <a:off x="0" y="2862448"/>
-          <a:ext cx="11350615" cy="796950"/>
+          <a:off x="0" y="2735526"/>
+          <a:ext cx="11350615" cy="1008787"/>
         </a:xfrm>
         <a:prstGeom prst="rect">
           <a:avLst/>
@@ -9376,7 +9376,7 @@
         <a:fontRef idx="minor"/>
       </dsp:style>
       <dsp:txBody>
-        <a:bodyPr spcFirstLastPara="0" vert="horz" wrap="square" lIns="880934" tIns="458216" rIns="880934" bIns="113792" numCol="1" spcCol="1270" anchor="t" anchorCtr="0">
+        <a:bodyPr spcFirstLastPara="0" vert="horz" wrap="square" lIns="880934" tIns="437388" rIns="880934" bIns="113792" numCol="1" spcCol="1270" anchor="t" anchorCtr="0">
           <a:noAutofit/>
         </a:bodyPr>
         <a:lstStyle/>
@@ -9403,13 +9403,13 @@
           </a:r>
           <a:r>
             <a:rPr lang="en-SG" sz="1600" b="1" kern="1200" dirty="0"/>
-            <a:t>how many churners are captured within target segments such as the top 10% or 20%.</a:t>
+            <a:t>how many churners are captured within target segments such as the top 10% or 20% of customers.</a:t>
           </a:r>
         </a:p>
       </dsp:txBody>
       <dsp:txXfrm>
-        <a:off x="0" y="2862448"/>
-        <a:ext cx="11350615" cy="796950"/>
+        <a:off x="0" y="2735526"/>
+        <a:ext cx="11350615" cy="1008787"/>
       </dsp:txXfrm>
     </dsp:sp>
     <dsp:sp modelId="{16AE6EC2-5D5B-45CF-A59D-52462F45AB43}">
@@ -9419,8 +9419,8 @@
       </dsp:nvSpPr>
       <dsp:spPr>
         <a:xfrm>
-          <a:off x="567530" y="2537728"/>
-          <a:ext cx="7945431" cy="649440"/>
+          <a:off x="567530" y="2425566"/>
+          <a:ext cx="7945431" cy="619920"/>
         </a:xfrm>
         <a:prstGeom prst="roundRect">
           <a:avLst/>
@@ -9480,13 +9480,13 @@
           </a:pPr>
           <a:r>
             <a:rPr lang="en-SG" sz="1600" b="1" kern="1200" dirty="0"/>
-            <a:t>Use Top-K evaluation</a:t>
+            <a:t>Use Top-K% evaluation</a:t>
           </a:r>
         </a:p>
       </dsp:txBody>
       <dsp:txXfrm>
-        <a:off x="599233" y="2569431"/>
-        <a:ext cx="7882025" cy="586034"/>
+        <a:off x="597792" y="2455828"/>
+        <a:ext cx="7884907" cy="559396"/>
       </dsp:txXfrm>
     </dsp:sp>
     <dsp:sp modelId="{2981F39D-A336-4BB9-9956-AE5D996342D5}">
@@ -9496,8 +9496,8 @@
       </dsp:nvSpPr>
       <dsp:spPr>
         <a:xfrm>
-          <a:off x="0" y="4102919"/>
-          <a:ext cx="11350615" cy="1074150"/>
+          <a:off x="0" y="4167674"/>
+          <a:ext cx="11350615" cy="1041862"/>
         </a:xfrm>
         <a:prstGeom prst="rect">
           <a:avLst/>
@@ -9537,7 +9537,7 @@
         <a:fontRef idx="minor"/>
       </dsp:style>
       <dsp:txBody>
-        <a:bodyPr spcFirstLastPara="0" vert="horz" wrap="square" lIns="880934" tIns="458216" rIns="880934" bIns="113792" numCol="1" spcCol="1270" anchor="t" anchorCtr="0">
+        <a:bodyPr spcFirstLastPara="0" vert="horz" wrap="square" lIns="880934" tIns="437388" rIns="880934" bIns="113792" numCol="1" spcCol="1270" anchor="t" anchorCtr="0">
           <a:noAutofit/>
         </a:bodyPr>
         <a:lstStyle/>
@@ -9585,8 +9585,8 @@
         </a:p>
       </dsp:txBody>
       <dsp:txXfrm>
-        <a:off x="0" y="4102919"/>
-        <a:ext cx="11350615" cy="1074150"/>
+        <a:off x="0" y="4167674"/>
+        <a:ext cx="11350615" cy="1041862"/>
       </dsp:txXfrm>
     </dsp:sp>
     <dsp:sp modelId="{F0519E15-B7D6-48BA-B397-B1714BED6080}">
@@ -9596,8 +9596,8 @@
       </dsp:nvSpPr>
       <dsp:spPr>
         <a:xfrm>
-          <a:off x="567530" y="3778199"/>
-          <a:ext cx="7945431" cy="649440"/>
+          <a:off x="567530" y="3857714"/>
+          <a:ext cx="7945431" cy="619920"/>
         </a:xfrm>
         <a:prstGeom prst="roundRect">
           <a:avLst/>
@@ -9662,8 +9662,8 @@
         </a:p>
       </dsp:txBody>
       <dsp:txXfrm>
-        <a:off x="599233" y="3809902"/>
-        <a:ext cx="7882025" cy="586034"/>
+        <a:off x="597792" y="3887976"/>
+        <a:ext cx="7884907" cy="559396"/>
       </dsp:txXfrm>
     </dsp:sp>
   </dsp:spTree>
@@ -28149,7 +28149,7 @@
           <a:p>
             <a:r>
               <a:rPr lang="en-SG" b="1" dirty="0"/>
-              <a:t>Top-K targeting</a:t>
+              <a:t>Top-K% targeting</a:t>
             </a:r>
             <a:r>
               <a:rPr lang="en-SG" dirty="0"/>
@@ -28463,7 +28463,7 @@
             <p:ph sz="quarter" idx="13"/>
             <p:extLst>
               <p:ext uri="{D42A27DB-BD31-4B8C-83A1-F6EECF244321}">
-                <p14:modId xmlns:p14="http://schemas.microsoft.com/office/powerpoint/2010/main" val="1885984863"/>
+                <p14:modId xmlns:p14="http://schemas.microsoft.com/office/powerpoint/2010/main" val="1607564461"/>
               </p:ext>
             </p:extLst>
           </p:nvPr>
